--- a/templates/static/chart/line_chart_red_business.pptx
+++ b/templates/static/chart/line_chart_red_business.pptx
@@ -3119,6 +3119,1938 @@
             </a:pPr>
             <a:r>
               <a:t>趋势分析</a:t>
+            </a:r>
+          </a:p>
+        </p:txBody>
+      </p:sp>
+      <p:sp>
+        <p:nvSpPr>
+          <p:cNvPr id="3" name="TextBox 2"/>
+          <p:cNvSpPr txBox="1"/>
+          <p:nvPr/>
+        </p:nvSpPr>
+        <p:spPr>
+          <a:xfrm>
+            <a:off x="365760" y="5650992"/>
+            <a:ext cx="640080" cy="219456"/>
+          </a:xfrm>
+          <a:prstGeom prst="rect">
+            <a:avLst/>
+          </a:prstGeom>
+          <a:noFill/>
+        </p:spPr>
+        <p:txBody>
+          <a:bodyPr wrap="square">
+            <a:spAutoFit/>
+          </a:bodyPr>
+          <a:lstStyle/>
+          <a:p>
+            <a:pPr algn="r">
+              <a:defRPr sz="900" b="0">
+                <a:solidFill>
+                  <a:srgbClr val="7F8C8D"/>
+                </a:solidFill>
+              </a:defRPr>
+            </a:pPr>
+            <a:r>
+              <a:t>0</a:t>
+            </a:r>
+          </a:p>
+        </p:txBody>
+      </p:sp>
+      <p:cxnSp>
+        <p:nvCxnSpPr>
+          <p:cNvPr id="4" name="Connector 3"/>
+          <p:cNvCxnSpPr/>
+          <p:nvPr/>
+        </p:nvCxnSpPr>
+        <p:spPr>
+          <a:xfrm>
+            <a:off x="1097280" y="4882896"/>
+            <a:ext cx="7589520" cy="0"/>
+          </a:xfrm>
+          <a:prstGeom prst="line">
+            <a:avLst/>
+          </a:prstGeom>
+          <a:ln w="9525">
+            <a:solidFill>
+              <a:srgbClr val="ECF0F1"/>
+            </a:solidFill>
+          </a:ln>
+        </p:spPr>
+        <p:style>
+          <a:lnRef idx="2">
+            <a:schemeClr val="accent1"/>
+          </a:lnRef>
+          <a:fillRef idx="0">
+            <a:schemeClr val="accent1"/>
+          </a:fillRef>
+          <a:effectRef idx="1">
+            <a:schemeClr val="accent1"/>
+          </a:effectRef>
+          <a:fontRef idx="minor">
+            <a:schemeClr val="tx1"/>
+          </a:fontRef>
+        </p:style>
+      </p:cxnSp>
+      <p:sp>
+        <p:nvSpPr>
+          <p:cNvPr id="5" name="TextBox 4"/>
+          <p:cNvSpPr txBox="1"/>
+          <p:nvPr/>
+        </p:nvSpPr>
+        <p:spPr>
+          <a:xfrm>
+            <a:off x="365760" y="4773168"/>
+            <a:ext cx="640080" cy="219456"/>
+          </a:xfrm>
+          <a:prstGeom prst="rect">
+            <a:avLst/>
+          </a:prstGeom>
+          <a:noFill/>
+        </p:spPr>
+        <p:txBody>
+          <a:bodyPr wrap="square">
+            <a:spAutoFit/>
+          </a:bodyPr>
+          <a:lstStyle/>
+          <a:p>
+            <a:pPr algn="r">
+              <a:defRPr sz="900" b="0">
+                <a:solidFill>
+                  <a:srgbClr val="7F8C8D"/>
+                </a:solidFill>
+              </a:defRPr>
+            </a:pPr>
+            <a:r>
+              <a:t>62</a:t>
+            </a:r>
+          </a:p>
+        </p:txBody>
+      </p:sp>
+      <p:cxnSp>
+        <p:nvCxnSpPr>
+          <p:cNvPr id="6" name="Connector 5"/>
+          <p:cNvCxnSpPr/>
+          <p:nvPr/>
+        </p:nvCxnSpPr>
+        <p:spPr>
+          <a:xfrm>
+            <a:off x="1097280" y="4005072"/>
+            <a:ext cx="7589520" cy="0"/>
+          </a:xfrm>
+          <a:prstGeom prst="line">
+            <a:avLst/>
+          </a:prstGeom>
+          <a:ln w="9525">
+            <a:solidFill>
+              <a:srgbClr val="ECF0F1"/>
+            </a:solidFill>
+          </a:ln>
+        </p:spPr>
+        <p:style>
+          <a:lnRef idx="2">
+            <a:schemeClr val="accent1"/>
+          </a:lnRef>
+          <a:fillRef idx="0">
+            <a:schemeClr val="accent1"/>
+          </a:fillRef>
+          <a:effectRef idx="1">
+            <a:schemeClr val="accent1"/>
+          </a:effectRef>
+          <a:fontRef idx="minor">
+            <a:schemeClr val="tx1"/>
+          </a:fontRef>
+        </p:style>
+      </p:cxnSp>
+      <p:sp>
+        <p:nvSpPr>
+          <p:cNvPr id="7" name="TextBox 6"/>
+          <p:cNvSpPr txBox="1"/>
+          <p:nvPr/>
+        </p:nvSpPr>
+        <p:spPr>
+          <a:xfrm>
+            <a:off x="365760" y="3895344"/>
+            <a:ext cx="640080" cy="219456"/>
+          </a:xfrm>
+          <a:prstGeom prst="rect">
+            <a:avLst/>
+          </a:prstGeom>
+          <a:noFill/>
+        </p:spPr>
+        <p:txBody>
+          <a:bodyPr wrap="square">
+            <a:spAutoFit/>
+          </a:bodyPr>
+          <a:lstStyle/>
+          <a:p>
+            <a:pPr algn="r">
+              <a:defRPr sz="900" b="0">
+                <a:solidFill>
+                  <a:srgbClr val="7F8C8D"/>
+                </a:solidFill>
+              </a:defRPr>
+            </a:pPr>
+            <a:r>
+              <a:t>123</a:t>
+            </a:r>
+          </a:p>
+        </p:txBody>
+      </p:sp>
+      <p:cxnSp>
+        <p:nvCxnSpPr>
+          <p:cNvPr id="8" name="Connector 7"/>
+          <p:cNvCxnSpPr/>
+          <p:nvPr/>
+        </p:nvCxnSpPr>
+        <p:spPr>
+          <a:xfrm>
+            <a:off x="1097280" y="3127248"/>
+            <a:ext cx="7589520" cy="0"/>
+          </a:xfrm>
+          <a:prstGeom prst="line">
+            <a:avLst/>
+          </a:prstGeom>
+          <a:ln w="9525">
+            <a:solidFill>
+              <a:srgbClr val="ECF0F1"/>
+            </a:solidFill>
+          </a:ln>
+        </p:spPr>
+        <p:style>
+          <a:lnRef idx="2">
+            <a:schemeClr val="accent1"/>
+          </a:lnRef>
+          <a:fillRef idx="0">
+            <a:schemeClr val="accent1"/>
+          </a:fillRef>
+          <a:effectRef idx="1">
+            <a:schemeClr val="accent1"/>
+          </a:effectRef>
+          <a:fontRef idx="minor">
+            <a:schemeClr val="tx1"/>
+          </a:fontRef>
+        </p:style>
+      </p:cxnSp>
+      <p:sp>
+        <p:nvSpPr>
+          <p:cNvPr id="9" name="TextBox 8"/>
+          <p:cNvSpPr txBox="1"/>
+          <p:nvPr/>
+        </p:nvSpPr>
+        <p:spPr>
+          <a:xfrm>
+            <a:off x="365760" y="3017520"/>
+            <a:ext cx="640080" cy="219456"/>
+          </a:xfrm>
+          <a:prstGeom prst="rect">
+            <a:avLst/>
+          </a:prstGeom>
+          <a:noFill/>
+        </p:spPr>
+        <p:txBody>
+          <a:bodyPr wrap="square">
+            <a:spAutoFit/>
+          </a:bodyPr>
+          <a:lstStyle/>
+          <a:p>
+            <a:pPr algn="r">
+              <a:defRPr sz="900" b="0">
+                <a:solidFill>
+                  <a:srgbClr val="7F8C8D"/>
+                </a:solidFill>
+              </a:defRPr>
+            </a:pPr>
+            <a:r>
+              <a:t>185</a:t>
+            </a:r>
+          </a:p>
+        </p:txBody>
+      </p:sp>
+      <p:cxnSp>
+        <p:nvCxnSpPr>
+          <p:cNvPr id="10" name="Connector 9"/>
+          <p:cNvCxnSpPr/>
+          <p:nvPr/>
+        </p:nvCxnSpPr>
+        <p:spPr>
+          <a:xfrm>
+            <a:off x="1097280" y="2249424"/>
+            <a:ext cx="7589520" cy="0"/>
+          </a:xfrm>
+          <a:prstGeom prst="line">
+            <a:avLst/>
+          </a:prstGeom>
+          <a:ln w="9525">
+            <a:solidFill>
+              <a:srgbClr val="ECF0F1"/>
+            </a:solidFill>
+          </a:ln>
+        </p:spPr>
+        <p:style>
+          <a:lnRef idx="2">
+            <a:schemeClr val="accent1"/>
+          </a:lnRef>
+          <a:fillRef idx="0">
+            <a:schemeClr val="accent1"/>
+          </a:fillRef>
+          <a:effectRef idx="1">
+            <a:schemeClr val="accent1"/>
+          </a:effectRef>
+          <a:fontRef idx="minor">
+            <a:schemeClr val="tx1"/>
+          </a:fontRef>
+        </p:style>
+      </p:cxnSp>
+      <p:sp>
+        <p:nvSpPr>
+          <p:cNvPr id="11" name="TextBox 10"/>
+          <p:cNvSpPr txBox="1"/>
+          <p:nvPr/>
+        </p:nvSpPr>
+        <p:spPr>
+          <a:xfrm>
+            <a:off x="365760" y="2139696"/>
+            <a:ext cx="640080" cy="219456"/>
+          </a:xfrm>
+          <a:prstGeom prst="rect">
+            <a:avLst/>
+          </a:prstGeom>
+          <a:noFill/>
+        </p:spPr>
+        <p:txBody>
+          <a:bodyPr wrap="square">
+            <a:spAutoFit/>
+          </a:bodyPr>
+          <a:lstStyle/>
+          <a:p>
+            <a:pPr algn="r">
+              <a:defRPr sz="900" b="0">
+                <a:solidFill>
+                  <a:srgbClr val="7F8C8D"/>
+                </a:solidFill>
+              </a:defRPr>
+            </a:pPr>
+            <a:r>
+              <a:t>247</a:t>
+            </a:r>
+          </a:p>
+        </p:txBody>
+      </p:sp>
+      <p:cxnSp>
+        <p:nvCxnSpPr>
+          <p:cNvPr id="12" name="Connector 11"/>
+          <p:cNvCxnSpPr/>
+          <p:nvPr/>
+        </p:nvCxnSpPr>
+        <p:spPr>
+          <a:xfrm>
+            <a:off x="1097280" y="1371600"/>
+            <a:ext cx="7589520" cy="0"/>
+          </a:xfrm>
+          <a:prstGeom prst="line">
+            <a:avLst/>
+          </a:prstGeom>
+          <a:ln w="9525">
+            <a:solidFill>
+              <a:srgbClr val="ECF0F1"/>
+            </a:solidFill>
+          </a:ln>
+        </p:spPr>
+        <p:style>
+          <a:lnRef idx="2">
+            <a:schemeClr val="accent1"/>
+          </a:lnRef>
+          <a:fillRef idx="0">
+            <a:schemeClr val="accent1"/>
+          </a:fillRef>
+          <a:effectRef idx="1">
+            <a:schemeClr val="accent1"/>
+          </a:effectRef>
+          <a:fontRef idx="minor">
+            <a:schemeClr val="tx1"/>
+          </a:fontRef>
+        </p:style>
+      </p:cxnSp>
+      <p:sp>
+        <p:nvSpPr>
+          <p:cNvPr id="13" name="TextBox 12"/>
+          <p:cNvSpPr txBox="1"/>
+          <p:nvPr/>
+        </p:nvSpPr>
+        <p:spPr>
+          <a:xfrm>
+            <a:off x="365760" y="1261872"/>
+            <a:ext cx="640080" cy="219456"/>
+          </a:xfrm>
+          <a:prstGeom prst="rect">
+            <a:avLst/>
+          </a:prstGeom>
+          <a:noFill/>
+        </p:spPr>
+        <p:txBody>
+          <a:bodyPr wrap="square">
+            <a:spAutoFit/>
+          </a:bodyPr>
+          <a:lstStyle/>
+          <a:p>
+            <a:pPr algn="r">
+              <a:defRPr sz="900" b="0">
+                <a:solidFill>
+                  <a:srgbClr val="7F8C8D"/>
+                </a:solidFill>
+              </a:defRPr>
+            </a:pPr>
+            <a:r>
+              <a:t>308</a:t>
+            </a:r>
+          </a:p>
+        </p:txBody>
+      </p:sp>
+      <p:cxnSp>
+        <p:nvCxnSpPr>
+          <p:cNvPr id="14" name="Connector 13"/>
+          <p:cNvCxnSpPr/>
+          <p:nvPr/>
+        </p:nvCxnSpPr>
+        <p:spPr>
+          <a:xfrm>
+            <a:off x="1097280" y="5760720"/>
+            <a:ext cx="7589520" cy="0"/>
+          </a:xfrm>
+          <a:prstGeom prst="line">
+            <a:avLst/>
+          </a:prstGeom>
+          <a:ln w="19050">
+            <a:solidFill>
+              <a:srgbClr val="BDC3C7"/>
+            </a:solidFill>
+          </a:ln>
+        </p:spPr>
+        <p:style>
+          <a:lnRef idx="2">
+            <a:schemeClr val="accent1"/>
+          </a:lnRef>
+          <a:fillRef idx="0">
+            <a:schemeClr val="accent1"/>
+          </a:fillRef>
+          <a:effectRef idx="1">
+            <a:schemeClr val="accent1"/>
+          </a:effectRef>
+          <a:fontRef idx="minor">
+            <a:schemeClr val="tx1"/>
+          </a:fontRef>
+        </p:style>
+      </p:cxnSp>
+      <p:cxnSp>
+        <p:nvCxnSpPr>
+          <p:cNvPr id="15" name="Connector 14"/>
+          <p:cNvCxnSpPr/>
+          <p:nvPr/>
+        </p:nvCxnSpPr>
+        <p:spPr>
+          <a:xfrm>
+            <a:off x="1097280" y="1371600"/>
+            <a:ext cx="0" cy="4389120"/>
+          </a:xfrm>
+          <a:prstGeom prst="line">
+            <a:avLst/>
+          </a:prstGeom>
+          <a:ln w="6350">
+            <a:solidFill>
+              <a:srgbClr val="F5F5F5"/>
+            </a:solidFill>
+          </a:ln>
+        </p:spPr>
+        <p:style>
+          <a:lnRef idx="2">
+            <a:schemeClr val="accent1"/>
+          </a:lnRef>
+          <a:fillRef idx="0">
+            <a:schemeClr val="accent1"/>
+          </a:fillRef>
+          <a:effectRef idx="1">
+            <a:schemeClr val="accent1"/>
+          </a:effectRef>
+          <a:fontRef idx="minor">
+            <a:schemeClr val="tx1"/>
+          </a:fontRef>
+        </p:style>
+      </p:cxnSp>
+      <p:cxnSp>
+        <p:nvCxnSpPr>
+          <p:cNvPr id="16" name="Connector 15"/>
+          <p:cNvCxnSpPr/>
+          <p:nvPr/>
+        </p:nvCxnSpPr>
+        <p:spPr>
+          <a:xfrm>
+            <a:off x="2615184" y="1371600"/>
+            <a:ext cx="0" cy="4389120"/>
+          </a:xfrm>
+          <a:prstGeom prst="line">
+            <a:avLst/>
+          </a:prstGeom>
+          <a:ln w="6350">
+            <a:solidFill>
+              <a:srgbClr val="F5F5F5"/>
+            </a:solidFill>
+          </a:ln>
+        </p:spPr>
+        <p:style>
+          <a:lnRef idx="2">
+            <a:schemeClr val="accent1"/>
+          </a:lnRef>
+          <a:fillRef idx="0">
+            <a:schemeClr val="accent1"/>
+          </a:fillRef>
+          <a:effectRef idx="1">
+            <a:schemeClr val="accent1"/>
+          </a:effectRef>
+          <a:fontRef idx="minor">
+            <a:schemeClr val="tx1"/>
+          </a:fontRef>
+        </p:style>
+      </p:cxnSp>
+      <p:cxnSp>
+        <p:nvCxnSpPr>
+          <p:cNvPr id="17" name="Connector 16"/>
+          <p:cNvCxnSpPr/>
+          <p:nvPr/>
+        </p:nvCxnSpPr>
+        <p:spPr>
+          <a:xfrm>
+            <a:off x="4133088" y="1371600"/>
+            <a:ext cx="0" cy="4389120"/>
+          </a:xfrm>
+          <a:prstGeom prst="line">
+            <a:avLst/>
+          </a:prstGeom>
+          <a:ln w="6350">
+            <a:solidFill>
+              <a:srgbClr val="F5F5F5"/>
+            </a:solidFill>
+          </a:ln>
+        </p:spPr>
+        <p:style>
+          <a:lnRef idx="2">
+            <a:schemeClr val="accent1"/>
+          </a:lnRef>
+          <a:fillRef idx="0">
+            <a:schemeClr val="accent1"/>
+          </a:fillRef>
+          <a:effectRef idx="1">
+            <a:schemeClr val="accent1"/>
+          </a:effectRef>
+          <a:fontRef idx="minor">
+            <a:schemeClr val="tx1"/>
+          </a:fontRef>
+        </p:style>
+      </p:cxnSp>
+      <p:cxnSp>
+        <p:nvCxnSpPr>
+          <p:cNvPr id="18" name="Connector 17"/>
+          <p:cNvCxnSpPr/>
+          <p:nvPr/>
+        </p:nvCxnSpPr>
+        <p:spPr>
+          <a:xfrm>
+            <a:off x="5650992" y="1371600"/>
+            <a:ext cx="0" cy="4389120"/>
+          </a:xfrm>
+          <a:prstGeom prst="line">
+            <a:avLst/>
+          </a:prstGeom>
+          <a:ln w="6350">
+            <a:solidFill>
+              <a:srgbClr val="F5F5F5"/>
+            </a:solidFill>
+          </a:ln>
+        </p:spPr>
+        <p:style>
+          <a:lnRef idx="2">
+            <a:schemeClr val="accent1"/>
+          </a:lnRef>
+          <a:fillRef idx="0">
+            <a:schemeClr val="accent1"/>
+          </a:fillRef>
+          <a:effectRef idx="1">
+            <a:schemeClr val="accent1"/>
+          </a:effectRef>
+          <a:fontRef idx="minor">
+            <a:schemeClr val="tx1"/>
+          </a:fontRef>
+        </p:style>
+      </p:cxnSp>
+      <p:cxnSp>
+        <p:nvCxnSpPr>
+          <p:cNvPr id="19" name="Connector 18"/>
+          <p:cNvCxnSpPr/>
+          <p:nvPr/>
+        </p:nvCxnSpPr>
+        <p:spPr>
+          <a:xfrm>
+            <a:off x="7168896" y="1371600"/>
+            <a:ext cx="0" cy="4389120"/>
+          </a:xfrm>
+          <a:prstGeom prst="line">
+            <a:avLst/>
+          </a:prstGeom>
+          <a:ln w="6350">
+            <a:solidFill>
+              <a:srgbClr val="F5F5F5"/>
+            </a:solidFill>
+          </a:ln>
+        </p:spPr>
+        <p:style>
+          <a:lnRef idx="2">
+            <a:schemeClr val="accent1"/>
+          </a:lnRef>
+          <a:fillRef idx="0">
+            <a:schemeClr val="accent1"/>
+          </a:fillRef>
+          <a:effectRef idx="1">
+            <a:schemeClr val="accent1"/>
+          </a:effectRef>
+          <a:fontRef idx="minor">
+            <a:schemeClr val="tx1"/>
+          </a:fontRef>
+        </p:style>
+      </p:cxnSp>
+      <p:cxnSp>
+        <p:nvCxnSpPr>
+          <p:cNvPr id="20" name="Connector 19"/>
+          <p:cNvCxnSpPr/>
+          <p:nvPr/>
+        </p:nvCxnSpPr>
+        <p:spPr>
+          <a:xfrm>
+            <a:off x="8686800" y="1371600"/>
+            <a:ext cx="0" cy="4389120"/>
+          </a:xfrm>
+          <a:prstGeom prst="line">
+            <a:avLst/>
+          </a:prstGeom>
+          <a:ln w="6350">
+            <a:solidFill>
+              <a:srgbClr val="F5F5F5"/>
+            </a:solidFill>
+          </a:ln>
+        </p:spPr>
+        <p:style>
+          <a:lnRef idx="2">
+            <a:schemeClr val="accent1"/>
+          </a:lnRef>
+          <a:fillRef idx="0">
+            <a:schemeClr val="accent1"/>
+          </a:fillRef>
+          <a:effectRef idx="1">
+            <a:schemeClr val="accent1"/>
+          </a:effectRef>
+          <a:fontRef idx="minor">
+            <a:schemeClr val="tx1"/>
+          </a:fontRef>
+        </p:style>
+      </p:cxnSp>
+      <p:cxnSp>
+        <p:nvCxnSpPr>
+          <p:cNvPr id="21" name="Connector 20"/>
+          <p:cNvCxnSpPr/>
+          <p:nvPr/>
+        </p:nvCxnSpPr>
+        <p:spPr>
+          <a:xfrm flipV="1">
+            <a:off x="1097280" y="3624549"/>
+            <a:ext cx="1517904" cy="427234"/>
+          </a:xfrm>
+          <a:prstGeom prst="line">
+            <a:avLst/>
+          </a:prstGeom>
+          <a:ln w="31750">
+            <a:solidFill>
+              <a:srgbClr val="3498DB"/>
+            </a:solidFill>
+          </a:ln>
+        </p:spPr>
+        <p:style>
+          <a:lnRef idx="2">
+            <a:schemeClr val="accent1"/>
+          </a:lnRef>
+          <a:fillRef idx="0">
+            <a:schemeClr val="accent1"/>
+          </a:fillRef>
+          <a:effectRef idx="1">
+            <a:schemeClr val="accent1"/>
+          </a:effectRef>
+          <a:fontRef idx="minor">
+            <a:schemeClr val="tx1"/>
+          </a:fontRef>
+        </p:style>
+      </p:cxnSp>
+      <p:cxnSp>
+        <p:nvCxnSpPr>
+          <p:cNvPr id="22" name="Connector 21"/>
+          <p:cNvCxnSpPr/>
+          <p:nvPr/>
+        </p:nvCxnSpPr>
+        <p:spPr>
+          <a:xfrm>
+            <a:off x="2615184" y="3624549"/>
+            <a:ext cx="1517904" cy="213617"/>
+          </a:xfrm>
+          <a:prstGeom prst="line">
+            <a:avLst/>
+          </a:prstGeom>
+          <a:ln w="31750">
+            <a:solidFill>
+              <a:srgbClr val="3498DB"/>
+            </a:solidFill>
+          </a:ln>
+        </p:spPr>
+        <p:style>
+          <a:lnRef idx="2">
+            <a:schemeClr val="accent1"/>
+          </a:lnRef>
+          <a:fillRef idx="0">
+            <a:schemeClr val="accent1"/>
+          </a:fillRef>
+          <a:effectRef idx="1">
+            <a:schemeClr val="accent1"/>
+          </a:effectRef>
+          <a:fontRef idx="minor">
+            <a:schemeClr val="tx1"/>
+          </a:fontRef>
+        </p:style>
+      </p:cxnSp>
+      <p:cxnSp>
+        <p:nvCxnSpPr>
+          <p:cNvPr id="23" name="Connector 22"/>
+          <p:cNvCxnSpPr/>
+          <p:nvPr/>
+        </p:nvCxnSpPr>
+        <p:spPr>
+          <a:xfrm flipV="1">
+            <a:off x="4133088" y="2912492"/>
+            <a:ext cx="1517904" cy="925674"/>
+          </a:xfrm>
+          <a:prstGeom prst="line">
+            <a:avLst/>
+          </a:prstGeom>
+          <a:ln w="31750">
+            <a:solidFill>
+              <a:srgbClr val="3498DB"/>
+            </a:solidFill>
+          </a:ln>
+        </p:spPr>
+        <p:style>
+          <a:lnRef idx="2">
+            <a:schemeClr val="accent1"/>
+          </a:lnRef>
+          <a:fillRef idx="0">
+            <a:schemeClr val="accent1"/>
+          </a:fillRef>
+          <a:effectRef idx="1">
+            <a:schemeClr val="accent1"/>
+          </a:effectRef>
+          <a:fontRef idx="minor">
+            <a:schemeClr val="tx1"/>
+          </a:fontRef>
+        </p:style>
+      </p:cxnSp>
+      <p:cxnSp>
+        <p:nvCxnSpPr>
+          <p:cNvPr id="24" name="Connector 23"/>
+          <p:cNvCxnSpPr/>
+          <p:nvPr/>
+        </p:nvCxnSpPr>
+        <p:spPr>
+          <a:xfrm>
+            <a:off x="5650992" y="2912492"/>
+            <a:ext cx="1517904" cy="284823"/>
+          </a:xfrm>
+          <a:prstGeom prst="line">
+            <a:avLst/>
+          </a:prstGeom>
+          <a:ln w="31750">
+            <a:solidFill>
+              <a:srgbClr val="3498DB"/>
+            </a:solidFill>
+          </a:ln>
+        </p:spPr>
+        <p:style>
+          <a:lnRef idx="2">
+            <a:schemeClr val="accent1"/>
+          </a:lnRef>
+          <a:fillRef idx="0">
+            <a:schemeClr val="accent1"/>
+          </a:fillRef>
+          <a:effectRef idx="1">
+            <a:schemeClr val="accent1"/>
+          </a:effectRef>
+          <a:fontRef idx="minor">
+            <a:schemeClr val="tx1"/>
+          </a:fontRef>
+        </p:style>
+      </p:cxnSp>
+      <p:cxnSp>
+        <p:nvCxnSpPr>
+          <p:cNvPr id="25" name="Connector 24"/>
+          <p:cNvCxnSpPr/>
+          <p:nvPr/>
+        </p:nvCxnSpPr>
+        <p:spPr>
+          <a:xfrm flipV="1">
+            <a:off x="7168896" y="2627669"/>
+            <a:ext cx="1517904" cy="569646"/>
+          </a:xfrm>
+          <a:prstGeom prst="line">
+            <a:avLst/>
+          </a:prstGeom>
+          <a:ln w="31750">
+            <a:solidFill>
+              <a:srgbClr val="3498DB"/>
+            </a:solidFill>
+          </a:ln>
+        </p:spPr>
+        <p:style>
+          <a:lnRef idx="2">
+            <a:schemeClr val="accent1"/>
+          </a:lnRef>
+          <a:fillRef idx="0">
+            <a:schemeClr val="accent1"/>
+          </a:fillRef>
+          <a:effectRef idx="1">
+            <a:schemeClr val="accent1"/>
+          </a:effectRef>
+          <a:fontRef idx="minor">
+            <a:schemeClr val="tx1"/>
+          </a:fontRef>
+        </p:style>
+      </p:cxnSp>
+      <p:sp>
+        <p:nvSpPr>
+          <p:cNvPr id="26" name="Oval 25"/>
+          <p:cNvSpPr/>
+          <p:nvPr/>
+        </p:nvSpPr>
+        <p:spPr>
+          <a:xfrm>
+            <a:off x="1024128" y="3978631"/>
+            <a:ext cx="146304" cy="146304"/>
+          </a:xfrm>
+          <a:prstGeom prst="ellipse">
+            <a:avLst/>
+          </a:prstGeom>
+          <a:solidFill>
+            <a:srgbClr val="3498DB"/>
+          </a:solidFill>
+          <a:ln>
+            <a:noFill/>
+          </a:ln>
+        </p:spPr>
+        <p:style>
+          <a:lnRef idx="1">
+            <a:schemeClr val="accent1"/>
+          </a:lnRef>
+          <a:fillRef idx="3">
+            <a:schemeClr val="accent1"/>
+          </a:fillRef>
+          <a:effectRef idx="2">
+            <a:schemeClr val="accent1"/>
+          </a:effectRef>
+          <a:fontRef idx="minor">
+            <a:schemeClr val="lt1"/>
+          </a:fontRef>
+        </p:style>
+        <p:txBody>
+          <a:bodyPr rtlCol="0" anchor="ctr"/>
+          <a:lstStyle/>
+          <a:p>
+            <a:pPr algn="ctr"/>
+          </a:p>
+        </p:txBody>
+      </p:sp>
+      <p:sp>
+        <p:nvSpPr>
+          <p:cNvPr id="27" name="Oval 26"/>
+          <p:cNvSpPr/>
+          <p:nvPr/>
+        </p:nvSpPr>
+        <p:spPr>
+          <a:xfrm>
+            <a:off x="2542032" y="3551397"/>
+            <a:ext cx="146304" cy="146304"/>
+          </a:xfrm>
+          <a:prstGeom prst="ellipse">
+            <a:avLst/>
+          </a:prstGeom>
+          <a:solidFill>
+            <a:srgbClr val="3498DB"/>
+          </a:solidFill>
+          <a:ln>
+            <a:noFill/>
+          </a:ln>
+        </p:spPr>
+        <p:style>
+          <a:lnRef idx="1">
+            <a:schemeClr val="accent1"/>
+          </a:lnRef>
+          <a:fillRef idx="3">
+            <a:schemeClr val="accent1"/>
+          </a:fillRef>
+          <a:effectRef idx="2">
+            <a:schemeClr val="accent1"/>
+          </a:effectRef>
+          <a:fontRef idx="minor">
+            <a:schemeClr val="lt1"/>
+          </a:fontRef>
+        </p:style>
+        <p:txBody>
+          <a:bodyPr rtlCol="0" anchor="ctr"/>
+          <a:lstStyle/>
+          <a:p>
+            <a:pPr algn="ctr"/>
+          </a:p>
+        </p:txBody>
+      </p:sp>
+      <p:sp>
+        <p:nvSpPr>
+          <p:cNvPr id="28" name="Oval 27"/>
+          <p:cNvSpPr/>
+          <p:nvPr/>
+        </p:nvSpPr>
+        <p:spPr>
+          <a:xfrm>
+            <a:off x="4059936" y="3765014"/>
+            <a:ext cx="146304" cy="146304"/>
+          </a:xfrm>
+          <a:prstGeom prst="ellipse">
+            <a:avLst/>
+          </a:prstGeom>
+          <a:solidFill>
+            <a:srgbClr val="3498DB"/>
+          </a:solidFill>
+          <a:ln>
+            <a:noFill/>
+          </a:ln>
+        </p:spPr>
+        <p:style>
+          <a:lnRef idx="1">
+            <a:schemeClr val="accent1"/>
+          </a:lnRef>
+          <a:fillRef idx="3">
+            <a:schemeClr val="accent1"/>
+          </a:fillRef>
+          <a:effectRef idx="2">
+            <a:schemeClr val="accent1"/>
+          </a:effectRef>
+          <a:fontRef idx="minor">
+            <a:schemeClr val="lt1"/>
+          </a:fontRef>
+        </p:style>
+        <p:txBody>
+          <a:bodyPr rtlCol="0" anchor="ctr"/>
+          <a:lstStyle/>
+          <a:p>
+            <a:pPr algn="ctr"/>
+          </a:p>
+        </p:txBody>
+      </p:sp>
+      <p:sp>
+        <p:nvSpPr>
+          <p:cNvPr id="29" name="Oval 28"/>
+          <p:cNvSpPr/>
+          <p:nvPr/>
+        </p:nvSpPr>
+        <p:spPr>
+          <a:xfrm>
+            <a:off x="5577840" y="2839340"/>
+            <a:ext cx="146304" cy="146304"/>
+          </a:xfrm>
+          <a:prstGeom prst="ellipse">
+            <a:avLst/>
+          </a:prstGeom>
+          <a:solidFill>
+            <a:srgbClr val="3498DB"/>
+          </a:solidFill>
+          <a:ln>
+            <a:noFill/>
+          </a:ln>
+        </p:spPr>
+        <p:style>
+          <a:lnRef idx="1">
+            <a:schemeClr val="accent1"/>
+          </a:lnRef>
+          <a:fillRef idx="3">
+            <a:schemeClr val="accent1"/>
+          </a:fillRef>
+          <a:effectRef idx="2">
+            <a:schemeClr val="accent1"/>
+          </a:effectRef>
+          <a:fontRef idx="minor">
+            <a:schemeClr val="lt1"/>
+          </a:fontRef>
+        </p:style>
+        <p:txBody>
+          <a:bodyPr rtlCol="0" anchor="ctr"/>
+          <a:lstStyle/>
+          <a:p>
+            <a:pPr algn="ctr"/>
+          </a:p>
+        </p:txBody>
+      </p:sp>
+      <p:sp>
+        <p:nvSpPr>
+          <p:cNvPr id="30" name="Oval 29"/>
+          <p:cNvSpPr/>
+          <p:nvPr/>
+        </p:nvSpPr>
+        <p:spPr>
+          <a:xfrm>
+            <a:off x="7095744" y="3124163"/>
+            <a:ext cx="146304" cy="146304"/>
+          </a:xfrm>
+          <a:prstGeom prst="ellipse">
+            <a:avLst/>
+          </a:prstGeom>
+          <a:solidFill>
+            <a:srgbClr val="3498DB"/>
+          </a:solidFill>
+          <a:ln>
+            <a:noFill/>
+          </a:ln>
+        </p:spPr>
+        <p:style>
+          <a:lnRef idx="1">
+            <a:schemeClr val="accent1"/>
+          </a:lnRef>
+          <a:fillRef idx="3">
+            <a:schemeClr val="accent1"/>
+          </a:fillRef>
+          <a:effectRef idx="2">
+            <a:schemeClr val="accent1"/>
+          </a:effectRef>
+          <a:fontRef idx="minor">
+            <a:schemeClr val="lt1"/>
+          </a:fontRef>
+        </p:style>
+        <p:txBody>
+          <a:bodyPr rtlCol="0" anchor="ctr"/>
+          <a:lstStyle/>
+          <a:p>
+            <a:pPr algn="ctr"/>
+          </a:p>
+        </p:txBody>
+      </p:sp>
+      <p:sp>
+        <p:nvSpPr>
+          <p:cNvPr id="31" name="Oval 30"/>
+          <p:cNvSpPr/>
+          <p:nvPr/>
+        </p:nvSpPr>
+        <p:spPr>
+          <a:xfrm>
+            <a:off x="8613648" y="2554517"/>
+            <a:ext cx="146304" cy="146304"/>
+          </a:xfrm>
+          <a:prstGeom prst="ellipse">
+            <a:avLst/>
+          </a:prstGeom>
+          <a:solidFill>
+            <a:srgbClr val="3498DB"/>
+          </a:solidFill>
+          <a:ln>
+            <a:noFill/>
+          </a:ln>
+        </p:spPr>
+        <p:style>
+          <a:lnRef idx="1">
+            <a:schemeClr val="accent1"/>
+          </a:lnRef>
+          <a:fillRef idx="3">
+            <a:schemeClr val="accent1"/>
+          </a:fillRef>
+          <a:effectRef idx="2">
+            <a:schemeClr val="accent1"/>
+          </a:effectRef>
+          <a:fontRef idx="minor">
+            <a:schemeClr val="lt1"/>
+          </a:fontRef>
+        </p:style>
+        <p:txBody>
+          <a:bodyPr rtlCol="0" anchor="ctr"/>
+          <a:lstStyle/>
+          <a:p>
+            <a:pPr algn="ctr"/>
+          </a:p>
+        </p:txBody>
+      </p:sp>
+      <p:sp>
+        <p:nvSpPr>
+          <p:cNvPr id="32" name="TextBox 31"/>
+          <p:cNvSpPr txBox="1"/>
+          <p:nvPr/>
+        </p:nvSpPr>
+        <p:spPr>
+          <a:xfrm>
+            <a:off x="640080" y="3777463"/>
+            <a:ext cx="914400" cy="182880"/>
+          </a:xfrm>
+          <a:prstGeom prst="rect">
+            <a:avLst/>
+          </a:prstGeom>
+          <a:noFill/>
+        </p:spPr>
+        <p:txBody>
+          <a:bodyPr wrap="square">
+            <a:spAutoFit/>
+          </a:bodyPr>
+          <a:lstStyle/>
+          <a:p>
+            <a:pPr algn="ctr">
+              <a:defRPr sz="900" b="1">
+                <a:solidFill>
+                  <a:srgbClr val="3498DB"/>
+                </a:solidFill>
+              </a:defRPr>
+            </a:pPr>
+            <a:r>
+              <a:t>2025</a:t>
+            </a:r>
+          </a:p>
+        </p:txBody>
+      </p:sp>
+      <p:cxnSp>
+        <p:nvCxnSpPr>
+          <p:cNvPr id="33" name="Connector 32"/>
+          <p:cNvCxnSpPr/>
+          <p:nvPr/>
+        </p:nvCxnSpPr>
+        <p:spPr>
+          <a:xfrm flipV="1">
+            <a:off x="1097280" y="3225797"/>
+            <a:ext cx="1517904" cy="398752"/>
+          </a:xfrm>
+          <a:prstGeom prst="line">
+            <a:avLst/>
+          </a:prstGeom>
+          <a:ln w="31750">
+            <a:solidFill>
+              <a:srgbClr val="E74C3C"/>
+            </a:solidFill>
+          </a:ln>
+        </p:spPr>
+        <p:style>
+          <a:lnRef idx="2">
+            <a:schemeClr val="accent1"/>
+          </a:lnRef>
+          <a:fillRef idx="0">
+            <a:schemeClr val="accent1"/>
+          </a:fillRef>
+          <a:effectRef idx="1">
+            <a:schemeClr val="accent1"/>
+          </a:effectRef>
+          <a:fontRef idx="minor">
+            <a:schemeClr val="tx1"/>
+          </a:fontRef>
+        </p:style>
+      </p:cxnSp>
+      <p:cxnSp>
+        <p:nvCxnSpPr>
+          <p:cNvPr id="34" name="Connector 33"/>
+          <p:cNvCxnSpPr/>
+          <p:nvPr/>
+        </p:nvCxnSpPr>
+        <p:spPr>
+          <a:xfrm>
+            <a:off x="2615184" y="3225797"/>
+            <a:ext cx="1517904" cy="185135"/>
+          </a:xfrm>
+          <a:prstGeom prst="line">
+            <a:avLst/>
+          </a:prstGeom>
+          <a:ln w="31750">
+            <a:solidFill>
+              <a:srgbClr val="E74C3C"/>
+            </a:solidFill>
+          </a:ln>
+        </p:spPr>
+        <p:style>
+          <a:lnRef idx="2">
+            <a:schemeClr val="accent1"/>
+          </a:lnRef>
+          <a:fillRef idx="0">
+            <a:schemeClr val="accent1"/>
+          </a:fillRef>
+          <a:effectRef idx="1">
+            <a:schemeClr val="accent1"/>
+          </a:effectRef>
+          <a:fontRef idx="minor">
+            <a:schemeClr val="tx1"/>
+          </a:fontRef>
+        </p:style>
+      </p:cxnSp>
+      <p:cxnSp>
+        <p:nvCxnSpPr>
+          <p:cNvPr id="35" name="Connector 34"/>
+          <p:cNvCxnSpPr/>
+          <p:nvPr/>
+        </p:nvCxnSpPr>
+        <p:spPr>
+          <a:xfrm flipV="1">
+            <a:off x="4133088" y="2399811"/>
+            <a:ext cx="1517904" cy="1011121"/>
+          </a:xfrm>
+          <a:prstGeom prst="line">
+            <a:avLst/>
+          </a:prstGeom>
+          <a:ln w="31750">
+            <a:solidFill>
+              <a:srgbClr val="E74C3C"/>
+            </a:solidFill>
+          </a:ln>
+        </p:spPr>
+        <p:style>
+          <a:lnRef idx="2">
+            <a:schemeClr val="accent1"/>
+          </a:lnRef>
+          <a:fillRef idx="0">
+            <a:schemeClr val="accent1"/>
+          </a:fillRef>
+          <a:effectRef idx="1">
+            <a:schemeClr val="accent1"/>
+          </a:effectRef>
+          <a:fontRef idx="minor">
+            <a:schemeClr val="tx1"/>
+          </a:fontRef>
+        </p:style>
+      </p:cxnSp>
+      <p:cxnSp>
+        <p:nvCxnSpPr>
+          <p:cNvPr id="36" name="Connector 35"/>
+          <p:cNvCxnSpPr/>
+          <p:nvPr/>
+        </p:nvCxnSpPr>
+        <p:spPr>
+          <a:xfrm>
+            <a:off x="5650992" y="2399811"/>
+            <a:ext cx="1517904" cy="313305"/>
+          </a:xfrm>
+          <a:prstGeom prst="line">
+            <a:avLst/>
+          </a:prstGeom>
+          <a:ln w="31750">
+            <a:solidFill>
+              <a:srgbClr val="E74C3C"/>
+            </a:solidFill>
+          </a:ln>
+        </p:spPr>
+        <p:style>
+          <a:lnRef idx="2">
+            <a:schemeClr val="accent1"/>
+          </a:lnRef>
+          <a:fillRef idx="0">
+            <a:schemeClr val="accent1"/>
+          </a:fillRef>
+          <a:effectRef idx="1">
+            <a:schemeClr val="accent1"/>
+          </a:effectRef>
+          <a:fontRef idx="minor">
+            <a:schemeClr val="tx1"/>
+          </a:fontRef>
+        </p:style>
+      </p:cxnSp>
+      <p:cxnSp>
+        <p:nvCxnSpPr>
+          <p:cNvPr id="37" name="Connector 36"/>
+          <p:cNvCxnSpPr/>
+          <p:nvPr/>
+        </p:nvCxnSpPr>
+        <p:spPr>
+          <a:xfrm flipV="1">
+            <a:off x="7168896" y="1944094"/>
+            <a:ext cx="1517904" cy="769022"/>
+          </a:xfrm>
+          <a:prstGeom prst="line">
+            <a:avLst/>
+          </a:prstGeom>
+          <a:ln w="31750">
+            <a:solidFill>
+              <a:srgbClr val="E74C3C"/>
+            </a:solidFill>
+          </a:ln>
+        </p:spPr>
+        <p:style>
+          <a:lnRef idx="2">
+            <a:schemeClr val="accent1"/>
+          </a:lnRef>
+          <a:fillRef idx="0">
+            <a:schemeClr val="accent1"/>
+          </a:fillRef>
+          <a:effectRef idx="1">
+            <a:schemeClr val="accent1"/>
+          </a:effectRef>
+          <a:fontRef idx="minor">
+            <a:schemeClr val="tx1"/>
+          </a:fontRef>
+        </p:style>
+      </p:cxnSp>
+      <p:sp>
+        <p:nvSpPr>
+          <p:cNvPr id="38" name="Oval 37"/>
+          <p:cNvSpPr/>
+          <p:nvPr/>
+        </p:nvSpPr>
+        <p:spPr>
+          <a:xfrm>
+            <a:off x="1024128" y="3551397"/>
+            <a:ext cx="146304" cy="146304"/>
+          </a:xfrm>
+          <a:prstGeom prst="ellipse">
+            <a:avLst/>
+          </a:prstGeom>
+          <a:solidFill>
+            <a:srgbClr val="E74C3C"/>
+          </a:solidFill>
+          <a:ln>
+            <a:noFill/>
+          </a:ln>
+        </p:spPr>
+        <p:style>
+          <a:lnRef idx="1">
+            <a:schemeClr val="accent1"/>
+          </a:lnRef>
+          <a:fillRef idx="3">
+            <a:schemeClr val="accent1"/>
+          </a:fillRef>
+          <a:effectRef idx="2">
+            <a:schemeClr val="accent1"/>
+          </a:effectRef>
+          <a:fontRef idx="minor">
+            <a:schemeClr val="lt1"/>
+          </a:fontRef>
+        </p:style>
+        <p:txBody>
+          <a:bodyPr rtlCol="0" anchor="ctr"/>
+          <a:lstStyle/>
+          <a:p>
+            <a:pPr algn="ctr"/>
+          </a:p>
+        </p:txBody>
+      </p:sp>
+      <p:sp>
+        <p:nvSpPr>
+          <p:cNvPr id="39" name="Oval 38"/>
+          <p:cNvSpPr/>
+          <p:nvPr/>
+        </p:nvSpPr>
+        <p:spPr>
+          <a:xfrm>
+            <a:off x="2542032" y="3152645"/>
+            <a:ext cx="146304" cy="146304"/>
+          </a:xfrm>
+          <a:prstGeom prst="ellipse">
+            <a:avLst/>
+          </a:prstGeom>
+          <a:solidFill>
+            <a:srgbClr val="E74C3C"/>
+          </a:solidFill>
+          <a:ln>
+            <a:noFill/>
+          </a:ln>
+        </p:spPr>
+        <p:style>
+          <a:lnRef idx="1">
+            <a:schemeClr val="accent1"/>
+          </a:lnRef>
+          <a:fillRef idx="3">
+            <a:schemeClr val="accent1"/>
+          </a:fillRef>
+          <a:effectRef idx="2">
+            <a:schemeClr val="accent1"/>
+          </a:effectRef>
+          <a:fontRef idx="minor">
+            <a:schemeClr val="lt1"/>
+          </a:fontRef>
+        </p:style>
+        <p:txBody>
+          <a:bodyPr rtlCol="0" anchor="ctr"/>
+          <a:lstStyle/>
+          <a:p>
+            <a:pPr algn="ctr"/>
+          </a:p>
+        </p:txBody>
+      </p:sp>
+      <p:sp>
+        <p:nvSpPr>
+          <p:cNvPr id="40" name="Oval 39"/>
+          <p:cNvSpPr/>
+          <p:nvPr/>
+        </p:nvSpPr>
+        <p:spPr>
+          <a:xfrm>
+            <a:off x="4059936" y="3337780"/>
+            <a:ext cx="146304" cy="146304"/>
+          </a:xfrm>
+          <a:prstGeom prst="ellipse">
+            <a:avLst/>
+          </a:prstGeom>
+          <a:solidFill>
+            <a:srgbClr val="E74C3C"/>
+          </a:solidFill>
+          <a:ln>
+            <a:noFill/>
+          </a:ln>
+        </p:spPr>
+        <p:style>
+          <a:lnRef idx="1">
+            <a:schemeClr val="accent1"/>
+          </a:lnRef>
+          <a:fillRef idx="3">
+            <a:schemeClr val="accent1"/>
+          </a:fillRef>
+          <a:effectRef idx="2">
+            <a:schemeClr val="accent1"/>
+          </a:effectRef>
+          <a:fontRef idx="minor">
+            <a:schemeClr val="lt1"/>
+          </a:fontRef>
+        </p:style>
+        <p:txBody>
+          <a:bodyPr rtlCol="0" anchor="ctr"/>
+          <a:lstStyle/>
+          <a:p>
+            <a:pPr algn="ctr"/>
+          </a:p>
+        </p:txBody>
+      </p:sp>
+      <p:sp>
+        <p:nvSpPr>
+          <p:cNvPr id="41" name="Oval 40"/>
+          <p:cNvSpPr/>
+          <p:nvPr/>
+        </p:nvSpPr>
+        <p:spPr>
+          <a:xfrm>
+            <a:off x="5577840" y="2326659"/>
+            <a:ext cx="146304" cy="146304"/>
+          </a:xfrm>
+          <a:prstGeom prst="ellipse">
+            <a:avLst/>
+          </a:prstGeom>
+          <a:solidFill>
+            <a:srgbClr val="E74C3C"/>
+          </a:solidFill>
+          <a:ln>
+            <a:noFill/>
+          </a:ln>
+        </p:spPr>
+        <p:style>
+          <a:lnRef idx="1">
+            <a:schemeClr val="accent1"/>
+          </a:lnRef>
+          <a:fillRef idx="3">
+            <a:schemeClr val="accent1"/>
+          </a:fillRef>
+          <a:effectRef idx="2">
+            <a:schemeClr val="accent1"/>
+          </a:effectRef>
+          <a:fontRef idx="minor">
+            <a:schemeClr val="lt1"/>
+          </a:fontRef>
+        </p:style>
+        <p:txBody>
+          <a:bodyPr rtlCol="0" anchor="ctr"/>
+          <a:lstStyle/>
+          <a:p>
+            <a:pPr algn="ctr"/>
+          </a:p>
+        </p:txBody>
+      </p:sp>
+      <p:sp>
+        <p:nvSpPr>
+          <p:cNvPr id="42" name="Oval 41"/>
+          <p:cNvSpPr/>
+          <p:nvPr/>
+        </p:nvSpPr>
+        <p:spPr>
+          <a:xfrm>
+            <a:off x="7095744" y="2639964"/>
+            <a:ext cx="146304" cy="146304"/>
+          </a:xfrm>
+          <a:prstGeom prst="ellipse">
+            <a:avLst/>
+          </a:prstGeom>
+          <a:solidFill>
+            <a:srgbClr val="E74C3C"/>
+          </a:solidFill>
+          <a:ln>
+            <a:noFill/>
+          </a:ln>
+        </p:spPr>
+        <p:style>
+          <a:lnRef idx="1">
+            <a:schemeClr val="accent1"/>
+          </a:lnRef>
+          <a:fillRef idx="3">
+            <a:schemeClr val="accent1"/>
+          </a:fillRef>
+          <a:effectRef idx="2">
+            <a:schemeClr val="accent1"/>
+          </a:effectRef>
+          <a:fontRef idx="minor">
+            <a:schemeClr val="lt1"/>
+          </a:fontRef>
+        </p:style>
+        <p:txBody>
+          <a:bodyPr rtlCol="0" anchor="ctr"/>
+          <a:lstStyle/>
+          <a:p>
+            <a:pPr algn="ctr"/>
+          </a:p>
+        </p:txBody>
+      </p:sp>
+      <p:sp>
+        <p:nvSpPr>
+          <p:cNvPr id="43" name="Oval 42"/>
+          <p:cNvSpPr/>
+          <p:nvPr/>
+        </p:nvSpPr>
+        <p:spPr>
+          <a:xfrm>
+            <a:off x="8613648" y="1870942"/>
+            <a:ext cx="146304" cy="146304"/>
+          </a:xfrm>
+          <a:prstGeom prst="ellipse">
+            <a:avLst/>
+          </a:prstGeom>
+          <a:solidFill>
+            <a:srgbClr val="E74C3C"/>
+          </a:solidFill>
+          <a:ln>
+            <a:noFill/>
+          </a:ln>
+        </p:spPr>
+        <p:style>
+          <a:lnRef idx="1">
+            <a:schemeClr val="accent1"/>
+          </a:lnRef>
+          <a:fillRef idx="3">
+            <a:schemeClr val="accent1"/>
+          </a:fillRef>
+          <a:effectRef idx="2">
+            <a:schemeClr val="accent1"/>
+          </a:effectRef>
+          <a:fontRef idx="minor">
+            <a:schemeClr val="lt1"/>
+          </a:fontRef>
+        </p:style>
+        <p:txBody>
+          <a:bodyPr rtlCol="0" anchor="ctr"/>
+          <a:lstStyle/>
+          <a:p>
+            <a:pPr algn="ctr"/>
+          </a:p>
+        </p:txBody>
+      </p:sp>
+      <p:sp>
+        <p:nvSpPr>
+          <p:cNvPr id="44" name="TextBox 43"/>
+          <p:cNvSpPr txBox="1"/>
+          <p:nvPr/>
+        </p:nvSpPr>
+        <p:spPr>
+          <a:xfrm>
+            <a:off x="640080" y="3350229"/>
+            <a:ext cx="914400" cy="182880"/>
+          </a:xfrm>
+          <a:prstGeom prst="rect">
+            <a:avLst/>
+          </a:prstGeom>
+          <a:noFill/>
+        </p:spPr>
+        <p:txBody>
+          <a:bodyPr wrap="square">
+            <a:spAutoFit/>
+          </a:bodyPr>
+          <a:lstStyle/>
+          <a:p>
+            <a:pPr algn="ctr">
+              <a:defRPr sz="900" b="1">
+                <a:solidFill>
+                  <a:srgbClr val="E74C3C"/>
+                </a:solidFill>
+              </a:defRPr>
+            </a:pPr>
+            <a:r>
+              <a:t>2026</a:t>
+            </a:r>
+          </a:p>
+        </p:txBody>
+      </p:sp>
+      <p:sp>
+        <p:nvSpPr>
+          <p:cNvPr id="45" name="TextBox 44"/>
+          <p:cNvSpPr txBox="1"/>
+          <p:nvPr/>
+        </p:nvSpPr>
+        <p:spPr>
+          <a:xfrm>
+            <a:off x="822960" y="5806440"/>
+            <a:ext cx="548640" cy="228600"/>
+          </a:xfrm>
+          <a:prstGeom prst="rect">
+            <a:avLst/>
+          </a:prstGeom>
+          <a:noFill/>
+        </p:spPr>
+        <p:txBody>
+          <a:bodyPr wrap="square">
+            <a:spAutoFit/>
+          </a:bodyPr>
+          <a:lstStyle/>
+          <a:p>
+            <a:pPr algn="ctr">
+              <a:defRPr sz="900" b="0">
+                <a:solidFill>
+                  <a:srgbClr val="555555"/>
+                </a:solidFill>
+              </a:defRPr>
+            </a:pPr>
+            <a:r>
+              <a:t>1月</a:t>
+            </a:r>
+          </a:p>
+        </p:txBody>
+      </p:sp>
+      <p:sp>
+        <p:nvSpPr>
+          <p:cNvPr id="46" name="TextBox 45"/>
+          <p:cNvSpPr txBox="1"/>
+          <p:nvPr/>
+        </p:nvSpPr>
+        <p:spPr>
+          <a:xfrm>
+            <a:off x="2340864" y="5806440"/>
+            <a:ext cx="548640" cy="228600"/>
+          </a:xfrm>
+          <a:prstGeom prst="rect">
+            <a:avLst/>
+          </a:prstGeom>
+          <a:noFill/>
+        </p:spPr>
+        <p:txBody>
+          <a:bodyPr wrap="square">
+            <a:spAutoFit/>
+          </a:bodyPr>
+          <a:lstStyle/>
+          <a:p>
+            <a:pPr algn="ctr">
+              <a:defRPr sz="900" b="0">
+                <a:solidFill>
+                  <a:srgbClr val="555555"/>
+                </a:solidFill>
+              </a:defRPr>
+            </a:pPr>
+            <a:r>
+              <a:t>3月</a:t>
+            </a:r>
+          </a:p>
+        </p:txBody>
+      </p:sp>
+      <p:sp>
+        <p:nvSpPr>
+          <p:cNvPr id="47" name="TextBox 46"/>
+          <p:cNvSpPr txBox="1"/>
+          <p:nvPr/>
+        </p:nvSpPr>
+        <p:spPr>
+          <a:xfrm>
+            <a:off x="3858768" y="5806440"/>
+            <a:ext cx="548640" cy="228600"/>
+          </a:xfrm>
+          <a:prstGeom prst="rect">
+            <a:avLst/>
+          </a:prstGeom>
+          <a:noFill/>
+        </p:spPr>
+        <p:txBody>
+          <a:bodyPr wrap="square">
+            <a:spAutoFit/>
+          </a:bodyPr>
+          <a:lstStyle/>
+          <a:p>
+            <a:pPr algn="ctr">
+              <a:defRPr sz="900" b="0">
+                <a:solidFill>
+                  <a:srgbClr val="555555"/>
+                </a:solidFill>
+              </a:defRPr>
+            </a:pPr>
+            <a:r>
+              <a:t>5月</a:t>
+            </a:r>
+          </a:p>
+        </p:txBody>
+      </p:sp>
+      <p:sp>
+        <p:nvSpPr>
+          <p:cNvPr id="48" name="TextBox 47"/>
+          <p:cNvSpPr txBox="1"/>
+          <p:nvPr/>
+        </p:nvSpPr>
+        <p:spPr>
+          <a:xfrm>
+            <a:off x="5376672" y="5806440"/>
+            <a:ext cx="548640" cy="228600"/>
+          </a:xfrm>
+          <a:prstGeom prst="rect">
+            <a:avLst/>
+          </a:prstGeom>
+          <a:noFill/>
+        </p:spPr>
+        <p:txBody>
+          <a:bodyPr wrap="square">
+            <a:spAutoFit/>
+          </a:bodyPr>
+          <a:lstStyle/>
+          <a:p>
+            <a:pPr algn="ctr">
+              <a:defRPr sz="900" b="0">
+                <a:solidFill>
+                  <a:srgbClr val="555555"/>
+                </a:solidFill>
+              </a:defRPr>
+            </a:pPr>
+            <a:r>
+              <a:t>7月</a:t>
+            </a:r>
+          </a:p>
+        </p:txBody>
+      </p:sp>
+      <p:sp>
+        <p:nvSpPr>
+          <p:cNvPr id="49" name="TextBox 48"/>
+          <p:cNvSpPr txBox="1"/>
+          <p:nvPr/>
+        </p:nvSpPr>
+        <p:spPr>
+          <a:xfrm>
+            <a:off x="6894576" y="5806440"/>
+            <a:ext cx="548640" cy="228600"/>
+          </a:xfrm>
+          <a:prstGeom prst="rect">
+            <a:avLst/>
+          </a:prstGeom>
+          <a:noFill/>
+        </p:spPr>
+        <p:txBody>
+          <a:bodyPr wrap="square">
+            <a:spAutoFit/>
+          </a:bodyPr>
+          <a:lstStyle/>
+          <a:p>
+            <a:pPr algn="ctr">
+              <a:defRPr sz="900" b="0">
+                <a:solidFill>
+                  <a:srgbClr val="555555"/>
+                </a:solidFill>
+              </a:defRPr>
+            </a:pPr>
+            <a:r>
+              <a:t>9月</a:t>
+            </a:r>
+          </a:p>
+        </p:txBody>
+      </p:sp>
+      <p:sp>
+        <p:nvSpPr>
+          <p:cNvPr id="50" name="TextBox 49"/>
+          <p:cNvSpPr txBox="1"/>
+          <p:nvPr/>
+        </p:nvSpPr>
+        <p:spPr>
+          <a:xfrm>
+            <a:off x="8412480" y="5806440"/>
+            <a:ext cx="548640" cy="228600"/>
+          </a:xfrm>
+          <a:prstGeom prst="rect">
+            <a:avLst/>
+          </a:prstGeom>
+          <a:noFill/>
+        </p:spPr>
+        <p:txBody>
+          <a:bodyPr wrap="square">
+            <a:spAutoFit/>
+          </a:bodyPr>
+          <a:lstStyle/>
+          <a:p>
+            <a:pPr algn="ctr">
+              <a:defRPr sz="900" b="0">
+                <a:solidFill>
+                  <a:srgbClr val="555555"/>
+                </a:solidFill>
+              </a:defRPr>
+            </a:pPr>
+            <a:r>
+              <a:t>11月</a:t>
+            </a:r>
+          </a:p>
+        </p:txBody>
+      </p:sp>
+      <p:sp>
+        <p:nvSpPr>
+          <p:cNvPr id="51" name="Oval 50"/>
+          <p:cNvSpPr/>
+          <p:nvPr/>
+        </p:nvSpPr>
+        <p:spPr>
+          <a:xfrm>
+            <a:off x="6400800" y="6080760"/>
+            <a:ext cx="109728" cy="109728"/>
+          </a:xfrm>
+          <a:prstGeom prst="ellipse">
+            <a:avLst/>
+          </a:prstGeom>
+          <a:solidFill>
+            <a:srgbClr val="3498DB"/>
+          </a:solidFill>
+          <a:ln>
+            <a:noFill/>
+          </a:ln>
+        </p:spPr>
+        <p:style>
+          <a:lnRef idx="1">
+            <a:schemeClr val="accent1"/>
+          </a:lnRef>
+          <a:fillRef idx="3">
+            <a:schemeClr val="accent1"/>
+          </a:fillRef>
+          <a:effectRef idx="2">
+            <a:schemeClr val="accent1"/>
+          </a:effectRef>
+          <a:fontRef idx="minor">
+            <a:schemeClr val="lt1"/>
+          </a:fontRef>
+        </p:style>
+        <p:txBody>
+          <a:bodyPr rtlCol="0" anchor="ctr"/>
+          <a:lstStyle/>
+          <a:p>
+            <a:pPr algn="ctr"/>
+          </a:p>
+        </p:txBody>
+      </p:sp>
+      <p:sp>
+        <p:nvSpPr>
+          <p:cNvPr id="52" name="TextBox 51"/>
+          <p:cNvSpPr txBox="1"/>
+          <p:nvPr/>
+        </p:nvSpPr>
+        <p:spPr>
+          <a:xfrm>
+            <a:off x="6565392" y="6053328"/>
+            <a:ext cx="914400" cy="182880"/>
+          </a:xfrm>
+          <a:prstGeom prst="rect">
+            <a:avLst/>
+          </a:prstGeom>
+          <a:noFill/>
+        </p:spPr>
+        <p:txBody>
+          <a:bodyPr wrap="square">
+            <a:spAutoFit/>
+          </a:bodyPr>
+          <a:lstStyle/>
+          <a:p>
+            <a:pPr algn="l">
+              <a:defRPr sz="900" b="0">
+                <a:solidFill>
+                  <a:srgbClr val="555555"/>
+                </a:solidFill>
+              </a:defRPr>
+            </a:pPr>
+            <a:r>
+              <a:t>2025</a:t>
+            </a:r>
+          </a:p>
+        </p:txBody>
+      </p:sp>
+      <p:sp>
+        <p:nvSpPr>
+          <p:cNvPr id="53" name="Oval 52"/>
+          <p:cNvSpPr/>
+          <p:nvPr/>
+        </p:nvSpPr>
+        <p:spPr>
+          <a:xfrm>
+            <a:off x="7772400" y="6080760"/>
+            <a:ext cx="109728" cy="109728"/>
+          </a:xfrm>
+          <a:prstGeom prst="ellipse">
+            <a:avLst/>
+          </a:prstGeom>
+          <a:solidFill>
+            <a:srgbClr val="E74C3C"/>
+          </a:solidFill>
+          <a:ln>
+            <a:noFill/>
+          </a:ln>
+        </p:spPr>
+        <p:style>
+          <a:lnRef idx="1">
+            <a:schemeClr val="accent1"/>
+          </a:lnRef>
+          <a:fillRef idx="3">
+            <a:schemeClr val="accent1"/>
+          </a:fillRef>
+          <a:effectRef idx="2">
+            <a:schemeClr val="accent1"/>
+          </a:effectRef>
+          <a:fontRef idx="minor">
+            <a:schemeClr val="lt1"/>
+          </a:fontRef>
+        </p:style>
+        <p:txBody>
+          <a:bodyPr rtlCol="0" anchor="ctr"/>
+          <a:lstStyle/>
+          <a:p>
+            <a:pPr algn="ctr"/>
+          </a:p>
+        </p:txBody>
+      </p:sp>
+      <p:sp>
+        <p:nvSpPr>
+          <p:cNvPr id="54" name="TextBox 53"/>
+          <p:cNvSpPr txBox="1"/>
+          <p:nvPr/>
+        </p:nvSpPr>
+        <p:spPr>
+          <a:xfrm>
+            <a:off x="7936992" y="6053328"/>
+            <a:ext cx="914400" cy="182880"/>
+          </a:xfrm>
+          <a:prstGeom prst="rect">
+            <a:avLst/>
+          </a:prstGeom>
+          <a:noFill/>
+        </p:spPr>
+        <p:txBody>
+          <a:bodyPr wrap="square">
+            <a:spAutoFit/>
+          </a:bodyPr>
+          <a:lstStyle/>
+          <a:p>
+            <a:pPr algn="l">
+              <a:defRPr sz="900" b="0">
+                <a:solidFill>
+                  <a:srgbClr val="555555"/>
+                </a:solidFill>
+              </a:defRPr>
+            </a:pPr>
+            <a:r>
+              <a:t>2026</a:t>
             </a:r>
           </a:p>
         </p:txBody>
